--- a/dist/초5/국어/독서와추론/초5_국어_독서와추론_02_글의구조.pptx
+++ b/dist/초5/국어/독서와추론/초5_국어_독서와추론_02_글의구조.pptx
@@ -121,13 +121,13 @@
   <p:extLst>
     <p:ext uri="{521415D9-36F7-43E2-AB2F-B90AF26B5E84}">
       <p14:sectionLst xmlns:p14="http://schemas.microsoft.com/office/powerpoint/2010/main">
-        <p14:section name="도입" id="{a0d58fa7-5aab-0418-b1f6-5122518cf50c}">
+        <p14:section name="도입" id="{67d0060d-6d1e-7d8a-920d-27f5affa7a95}">
           <p14:sldIdLst>
             <p14:sldId id="256"/>
             <p14:sldId id="257"/>
           </p14:sldIdLst>
         </p14:section>
-        <p14:section name="개념" id="{30dd2308-79f8-2f3e-9279-5919e0b2c4ce}">
+        <p14:section name="개념" id="{02db13d7-6cd0-f0d7-2da4-6fd59d459c65}">
           <p14:sldIdLst>
             <p14:sldId id="258"/>
             <p14:sldId id="259"/>
@@ -137,25 +137,25 @@
             <p14:sldId id="263"/>
           </p14:sldIdLst>
         </p14:section>
-        <p14:section name="연습" id="{f67505f1-b076-8036-c5fe-aeaec36a631e}">
+        <p14:section name="연습" id="{3304f138-213c-ae67-9758-c57d64520bd1}">
           <p14:sldIdLst>
             <p14:sldId id="264"/>
             <p14:sldId id="265"/>
           </p14:sldIdLst>
         </p14:section>
-        <p14:section name="확인" id="{bb94a01e-797a-674c-9bad-6d2681a54f79}">
+        <p14:section name="확인" id="{064b4755-2b04-a72b-08b4-0c62208cdf98}">
           <p14:sldIdLst>
             <p14:sldId id="266"/>
             <p14:sldId id="267"/>
             <p14:sldId id="268"/>
           </p14:sldIdLst>
         </p14:section>
-        <p14:section name="정리" id="{3cb49232-07f9-49ee-7f1c-ec04f6901767}">
+        <p14:section name="정리" id="{c786ff53-212a-b917-8274-f18da8eb1280}">
           <p14:sldIdLst>
             <p14:sldId id="269"/>
           </p14:sldIdLst>
         </p14:section>
-        <p14:section name="보충" id="{32cdcf35-e3a7-eee4-d7f5-1301f3371c3f}">
+        <p14:section name="보충" id="{ddf8564c-f16e-39ae-e945-f2cab2ea82e1}">
           <p14:sldIdLst>
             <p14:sldId id="270"/>
           </p14:sldIdLst>
